--- a/Navier-Stokes.pptx
+++ b/Navier-Stokes.pptx
@@ -122,7 +122,7 @@
   </p:defaultTextStyle>
   <p:extLst>
     <p:ext uri="{EFAFB233-063F-42B5-8137-9DF3F51BA10A}">
-      <p15:sldGuideLst xmlns="" xmlns:p15="http://schemas.microsoft.com/office/powerpoint/2012/main">
+      <p15:sldGuideLst xmlns:p15="http://schemas.microsoft.com/office/powerpoint/2012/main" xmlns="">
         <p15:guide id="1" orient="horz" pos="2160" userDrawn="1">
           <p15:clr>
             <a:srgbClr val="A4A3A4"/>
@@ -390,7 +390,7 @@
     </p:spTree>
     <p:extLst>
       <p:ext uri="{BB962C8B-B14F-4D97-AF65-F5344CB8AC3E}">
-        <p14:creationId xmlns="" xmlns:p14="http://schemas.microsoft.com/office/powerpoint/2010/main" val="3247008705"/>
+        <p14:creationId xmlns:p14="http://schemas.microsoft.com/office/powerpoint/2010/main" xmlns="" val="3247008705"/>
       </p:ext>
     </p:extLst>
   </p:cSld>
@@ -823,7 +823,7 @@
     </p:spTree>
     <p:extLst>
       <p:ext uri="{BB962C8B-B14F-4D97-AF65-F5344CB8AC3E}">
-        <p14:creationId xmlns="" xmlns:p14="http://schemas.microsoft.com/office/powerpoint/2010/main" val="1723321728"/>
+        <p14:creationId xmlns:p14="http://schemas.microsoft.com/office/powerpoint/2010/main" xmlns="" val="1723321728"/>
       </p:ext>
     </p:extLst>
   </p:cSld>
@@ -995,7 +995,7 @@
     </p:spTree>
     <p:extLst>
       <p:ext uri="{BB962C8B-B14F-4D97-AF65-F5344CB8AC3E}">
-        <p14:creationId xmlns="" xmlns:p14="http://schemas.microsoft.com/office/powerpoint/2010/main" val="1302534248"/>
+        <p14:creationId xmlns:p14="http://schemas.microsoft.com/office/powerpoint/2010/main" xmlns="" val="1302534248"/>
       </p:ext>
     </p:extLst>
   </p:cSld>
@@ -1269,7 +1269,7 @@
     </p:spTree>
     <p:extLst>
       <p:ext uri="{BB962C8B-B14F-4D97-AF65-F5344CB8AC3E}">
-        <p14:creationId xmlns="" xmlns:p14="http://schemas.microsoft.com/office/powerpoint/2010/main" val="2569524317"/>
+        <p14:creationId xmlns:p14="http://schemas.microsoft.com/office/powerpoint/2010/main" xmlns="" val="2569524317"/>
       </p:ext>
     </p:extLst>
   </p:cSld>
@@ -1441,7 +1441,7 @@
     </p:spTree>
     <p:extLst>
       <p:ext uri="{BB962C8B-B14F-4D97-AF65-F5344CB8AC3E}">
-        <p14:creationId xmlns="" xmlns:p14="http://schemas.microsoft.com/office/powerpoint/2010/main" val="1408600653"/>
+        <p14:creationId xmlns:p14="http://schemas.microsoft.com/office/powerpoint/2010/main" xmlns="" val="1408600653"/>
       </p:ext>
     </p:extLst>
   </p:cSld>
@@ -1832,7 +1832,7 @@
     </p:spTree>
     <p:extLst>
       <p:ext uri="{BB962C8B-B14F-4D97-AF65-F5344CB8AC3E}">
-        <p14:creationId xmlns="" xmlns:p14="http://schemas.microsoft.com/office/powerpoint/2010/main" val="2053147944"/>
+        <p14:creationId xmlns:p14="http://schemas.microsoft.com/office/powerpoint/2010/main" xmlns="" val="2053147944"/>
       </p:ext>
     </p:extLst>
   </p:cSld>
@@ -2071,7 +2071,7 @@
     </p:spTree>
     <p:extLst>
       <p:ext uri="{BB962C8B-B14F-4D97-AF65-F5344CB8AC3E}">
-        <p14:creationId xmlns="" xmlns:p14="http://schemas.microsoft.com/office/powerpoint/2010/main" val="4043038054"/>
+        <p14:creationId xmlns:p14="http://schemas.microsoft.com/office/powerpoint/2010/main" xmlns="" val="4043038054"/>
       </p:ext>
     </p:extLst>
   </p:cSld>
@@ -2452,7 +2452,7 @@
     </p:spTree>
     <p:extLst>
       <p:ext uri="{BB962C8B-B14F-4D97-AF65-F5344CB8AC3E}">
-        <p14:creationId xmlns="" xmlns:p14="http://schemas.microsoft.com/office/powerpoint/2010/main" val="1990695837"/>
+        <p14:creationId xmlns:p14="http://schemas.microsoft.com/office/powerpoint/2010/main" xmlns="" val="1990695837"/>
       </p:ext>
     </p:extLst>
   </p:cSld>
@@ -2572,7 +2572,7 @@
     </p:spTree>
     <p:extLst>
       <p:ext uri="{BB962C8B-B14F-4D97-AF65-F5344CB8AC3E}">
-        <p14:creationId xmlns="" xmlns:p14="http://schemas.microsoft.com/office/powerpoint/2010/main" val="729633179"/>
+        <p14:creationId xmlns:p14="http://schemas.microsoft.com/office/powerpoint/2010/main" xmlns="" val="729633179"/>
       </p:ext>
     </p:extLst>
   </p:cSld>
@@ -2769,7 +2769,7 @@
     </p:spTree>
     <p:extLst>
       <p:ext uri="{BB962C8B-B14F-4D97-AF65-F5344CB8AC3E}">
-        <p14:creationId xmlns="" xmlns:p14="http://schemas.microsoft.com/office/powerpoint/2010/main" val="3262215108"/>
+        <p14:creationId xmlns:p14="http://schemas.microsoft.com/office/powerpoint/2010/main" xmlns="" val="3262215108"/>
       </p:ext>
     </p:extLst>
   </p:cSld>
@@ -3154,7 +3154,7 @@
     </p:spTree>
     <p:extLst>
       <p:ext uri="{BB962C8B-B14F-4D97-AF65-F5344CB8AC3E}">
-        <p14:creationId xmlns="" xmlns:p14="http://schemas.microsoft.com/office/powerpoint/2010/main" val="2105051012"/>
+        <p14:creationId xmlns:p14="http://schemas.microsoft.com/office/powerpoint/2010/main" xmlns="" val="2105051012"/>
       </p:ext>
     </p:extLst>
   </p:cSld>
@@ -3528,7 +3528,7 @@
     </p:spTree>
     <p:extLst>
       <p:ext uri="{BB962C8B-B14F-4D97-AF65-F5344CB8AC3E}">
-        <p14:creationId xmlns="" xmlns:p14="http://schemas.microsoft.com/office/powerpoint/2010/main" val="1255569517"/>
+        <p14:creationId xmlns:p14="http://schemas.microsoft.com/office/powerpoint/2010/main" xmlns="" val="1255569517"/>
       </p:ext>
     </p:extLst>
   </p:cSld>
@@ -3903,7 +3903,7 @@
     </p:spTree>
     <p:extLst>
       <p:ext uri="{BB962C8B-B14F-4D97-AF65-F5344CB8AC3E}">
-        <p14:creationId xmlns="" xmlns:p14="http://schemas.microsoft.com/office/powerpoint/2010/main" val="754865681"/>
+        <p14:creationId xmlns:p14="http://schemas.microsoft.com/office/powerpoint/2010/main" xmlns="" val="754865681"/>
       </p:ext>
     </p:extLst>
   </p:cSld>
@@ -4312,7 +4312,7 @@
           <p:cNvPr id="2" name="Заголовок 1">
             <a:extLst>
               <a:ext uri="{FF2B5EF4-FFF2-40B4-BE49-F238E27FC236}">
-                <a16:creationId xmlns="" xmlns:a16="http://schemas.microsoft.com/office/drawing/2014/main" id="{9EBC007C-CDDA-6A8B-EA97-95AD041ED120}"/>
+                <a16:creationId xmlns:a16="http://schemas.microsoft.com/office/drawing/2014/main" xmlns="" id="{9EBC007C-CDDA-6A8B-EA97-95AD041ED120}"/>
               </a:ext>
             </a:extLst>
           </p:cNvPr>
@@ -4356,7 +4356,7 @@
           <p:cNvPr id="3" name="Подзаголовок 2">
             <a:extLst>
               <a:ext uri="{FF2B5EF4-FFF2-40B4-BE49-F238E27FC236}">
-                <a16:creationId xmlns="" xmlns:a16="http://schemas.microsoft.com/office/drawing/2014/main" id="{7243DF6D-9018-9C07-EE4A-96B180BCB70F}"/>
+                <a16:creationId xmlns:a16="http://schemas.microsoft.com/office/drawing/2014/main" xmlns="" id="{7243DF6D-9018-9C07-EE4A-96B180BCB70F}"/>
               </a:ext>
             </a:extLst>
           </p:cNvPr>
@@ -4399,7 +4399,7 @@
     </p:spTree>
     <p:extLst>
       <p:ext uri="{BB962C8B-B14F-4D97-AF65-F5344CB8AC3E}">
-        <p14:creationId xmlns="" xmlns:p14="http://schemas.microsoft.com/office/powerpoint/2010/main" val="2136617989"/>
+        <p14:creationId xmlns:p14="http://schemas.microsoft.com/office/powerpoint/2010/main" xmlns="" val="2136617989"/>
       </p:ext>
     </p:extLst>
   </p:cSld>
@@ -4417,7 +4417,7 @@
         <p:cNvPr id="1" name="">
           <a:extLst>
             <a:ext uri="{FF2B5EF4-FFF2-40B4-BE49-F238E27FC236}">
-              <a16:creationId xmlns="" xmlns:a16="http://schemas.microsoft.com/office/drawing/2014/main" id="{4B3CC565-3ECB-1A27-8EA5-BFCB1CD648FD}"/>
+              <a16:creationId xmlns:a16="http://schemas.microsoft.com/office/drawing/2014/main" xmlns="" id="{4B3CC565-3ECB-1A27-8EA5-BFCB1CD648FD}"/>
             </a:ext>
           </a:extLst>
         </p:cNvPr>
@@ -4437,7 +4437,7 @@
           <p:cNvPr id="2" name="Заголовок 1">
             <a:extLst>
               <a:ext uri="{FF2B5EF4-FFF2-40B4-BE49-F238E27FC236}">
-                <a16:creationId xmlns="" xmlns:a16="http://schemas.microsoft.com/office/drawing/2014/main" id="{B66C33E1-ADEA-3138-46CA-61C26FB478DE}"/>
+                <a16:creationId xmlns:a16="http://schemas.microsoft.com/office/drawing/2014/main" xmlns="" id="{B66C33E1-ADEA-3138-46CA-61C26FB478DE}"/>
               </a:ext>
             </a:extLst>
           </p:cNvPr>
@@ -4470,7 +4470,7 @@
           <p:cNvPr id="5" name="Объект 2">
             <a:extLst>
               <a:ext uri="{FF2B5EF4-FFF2-40B4-BE49-F238E27FC236}">
-                <a16:creationId xmlns="" xmlns:a16="http://schemas.microsoft.com/office/drawing/2014/main" id="{6C94871B-7A5F-E79D-D660-F3041F35D011}"/>
+                <a16:creationId xmlns:a16="http://schemas.microsoft.com/office/drawing/2014/main" xmlns="" id="{6C94871B-7A5F-E79D-D660-F3041F35D011}"/>
               </a:ext>
             </a:extLst>
           </p:cNvPr>
@@ -4805,7 +4805,7 @@
           <p:cNvPr id="3" name="Номер слайда 2">
             <a:extLst>
               <a:ext uri="{FF2B5EF4-FFF2-40B4-BE49-F238E27FC236}">
-                <a16:creationId xmlns="" xmlns:a16="http://schemas.microsoft.com/office/drawing/2014/main" id="{420B8735-74CF-8911-9226-05B8FDE46219}"/>
+                <a16:creationId xmlns:a16="http://schemas.microsoft.com/office/drawing/2014/main" xmlns="" id="{420B8735-74CF-8911-9226-05B8FDE46219}"/>
               </a:ext>
             </a:extLst>
           </p:cNvPr>
@@ -4866,7 +4866,7 @@
     </p:spTree>
     <p:extLst>
       <p:ext uri="{BB962C8B-B14F-4D97-AF65-F5344CB8AC3E}">
-        <p14:creationId xmlns="" xmlns:p14="http://schemas.microsoft.com/office/powerpoint/2010/main" val="67772030"/>
+        <p14:creationId xmlns:p14="http://schemas.microsoft.com/office/powerpoint/2010/main" xmlns="" val="67772030"/>
       </p:ext>
     </p:extLst>
   </p:cSld>
@@ -4898,7 +4898,7 @@
           <p:cNvPr id="2" name="Заголовок 1">
             <a:extLst>
               <a:ext uri="{FF2B5EF4-FFF2-40B4-BE49-F238E27FC236}">
-                <a16:creationId xmlns="" xmlns:a16="http://schemas.microsoft.com/office/drawing/2014/main" id="{3BAFD6D3-B8C8-EE34-AE42-41EF8FC51EDF}"/>
+                <a16:creationId xmlns:a16="http://schemas.microsoft.com/office/drawing/2014/main" xmlns="" id="{3BAFD6D3-B8C8-EE34-AE42-41EF8FC51EDF}"/>
               </a:ext>
             </a:extLst>
           </p:cNvPr>
@@ -4931,7 +4931,7 @@
           <p:cNvPr id="3" name="Объект 2">
             <a:extLst>
               <a:ext uri="{FF2B5EF4-FFF2-40B4-BE49-F238E27FC236}">
-                <a16:creationId xmlns="" xmlns:a16="http://schemas.microsoft.com/office/drawing/2014/main" id="{F854F796-5ED2-68E0-6680-CC6BFED62E21}"/>
+                <a16:creationId xmlns:a16="http://schemas.microsoft.com/office/drawing/2014/main" xmlns="" id="{F854F796-5ED2-68E0-6680-CC6BFED62E21}"/>
               </a:ext>
             </a:extLst>
           </p:cNvPr>
@@ -4968,7 +4968,7 @@
           <p:cNvPr id="4" name="Номер слайда 3">
             <a:extLst>
               <a:ext uri="{FF2B5EF4-FFF2-40B4-BE49-F238E27FC236}">
-                <a16:creationId xmlns="" xmlns:a16="http://schemas.microsoft.com/office/drawing/2014/main" id="{B8928B30-C3D2-9214-D411-5353BD527509}"/>
+                <a16:creationId xmlns:a16="http://schemas.microsoft.com/office/drawing/2014/main" xmlns="" id="{B8928B30-C3D2-9214-D411-5353BD527509}"/>
               </a:ext>
             </a:extLst>
           </p:cNvPr>
@@ -5022,7 +5022,7 @@
     </p:spTree>
     <p:extLst>
       <p:ext uri="{BB962C8B-B14F-4D97-AF65-F5344CB8AC3E}">
-        <p14:creationId xmlns="" xmlns:p14="http://schemas.microsoft.com/office/powerpoint/2010/main" val="662347663"/>
+        <p14:creationId xmlns:p14="http://schemas.microsoft.com/office/powerpoint/2010/main" xmlns="" val="662347663"/>
       </p:ext>
     </p:extLst>
   </p:cSld>
@@ -5054,7 +5054,7 @@
           <p:cNvPr id="2" name="Заголовок 1">
             <a:extLst>
               <a:ext uri="{FF2B5EF4-FFF2-40B4-BE49-F238E27FC236}">
-                <a16:creationId xmlns="" xmlns:a16="http://schemas.microsoft.com/office/drawing/2014/main" id="{3BAFD6D3-B8C8-EE34-AE42-41EF8FC51EDF}"/>
+                <a16:creationId xmlns:a16="http://schemas.microsoft.com/office/drawing/2014/main" xmlns="" id="{3BAFD6D3-B8C8-EE34-AE42-41EF8FC51EDF}"/>
               </a:ext>
             </a:extLst>
           </p:cNvPr>
@@ -5092,7 +5092,7 @@
           <p:cNvPr id="3" name="Объект 2">
             <a:extLst>
               <a:ext uri="{FF2B5EF4-FFF2-40B4-BE49-F238E27FC236}">
-                <a16:creationId xmlns="" xmlns:a16="http://schemas.microsoft.com/office/drawing/2014/main" id="{F854F796-5ED2-68E0-6680-CC6BFED62E21}"/>
+                <a16:creationId xmlns:a16="http://schemas.microsoft.com/office/drawing/2014/main" xmlns="" id="{F854F796-5ED2-68E0-6680-CC6BFED62E21}"/>
               </a:ext>
             </a:extLst>
           </p:cNvPr>
@@ -5129,7 +5129,7 @@
           <p:cNvPr id="4" name="Номер слайда 3">
             <a:extLst>
               <a:ext uri="{FF2B5EF4-FFF2-40B4-BE49-F238E27FC236}">
-                <a16:creationId xmlns="" xmlns:a16="http://schemas.microsoft.com/office/drawing/2014/main" id="{B8928B30-C3D2-9214-D411-5353BD527509}"/>
+                <a16:creationId xmlns:a16="http://schemas.microsoft.com/office/drawing/2014/main" xmlns="" id="{B8928B30-C3D2-9214-D411-5353BD527509}"/>
               </a:ext>
             </a:extLst>
           </p:cNvPr>
@@ -5183,7 +5183,7 @@
     </p:spTree>
     <p:extLst>
       <p:ext uri="{BB962C8B-B14F-4D97-AF65-F5344CB8AC3E}">
-        <p14:creationId xmlns="" xmlns:p14="http://schemas.microsoft.com/office/powerpoint/2010/main" val="662347663"/>
+        <p14:creationId xmlns:p14="http://schemas.microsoft.com/office/powerpoint/2010/main" xmlns="" val="662347663"/>
       </p:ext>
     </p:extLst>
   </p:cSld>
@@ -5201,7 +5201,7 @@
         <p:cNvPr id="1" name="">
           <a:extLst>
             <a:ext uri="{FF2B5EF4-FFF2-40B4-BE49-F238E27FC236}">
-              <a16:creationId xmlns="" xmlns:a16="http://schemas.microsoft.com/office/drawing/2014/main" id="{AB3339B5-8F3B-7354-96D4-A419DED217D6}"/>
+              <a16:creationId xmlns:a16="http://schemas.microsoft.com/office/drawing/2014/main" xmlns="" id="{AB3339B5-8F3B-7354-96D4-A419DED217D6}"/>
             </a:ext>
           </a:extLst>
         </p:cNvPr>
@@ -5221,7 +5221,7 @@
           <p:cNvPr id="2" name="Заголовок 1">
             <a:extLst>
               <a:ext uri="{FF2B5EF4-FFF2-40B4-BE49-F238E27FC236}">
-                <a16:creationId xmlns="" xmlns:a16="http://schemas.microsoft.com/office/drawing/2014/main" id="{9B249CE3-22A4-2BED-CBC1-7B7F40C7CDA9}"/>
+                <a16:creationId xmlns:a16="http://schemas.microsoft.com/office/drawing/2014/main" xmlns="" id="{9B249CE3-22A4-2BED-CBC1-7B7F40C7CDA9}"/>
               </a:ext>
             </a:extLst>
           </p:cNvPr>
@@ -6440,7 +6440,7 @@
           <p:cNvPr id="4" name="Номер слайда 3">
             <a:extLst>
               <a:ext uri="{FF2B5EF4-FFF2-40B4-BE49-F238E27FC236}">
-                <a16:creationId xmlns="" xmlns:a16="http://schemas.microsoft.com/office/drawing/2014/main" id="{1F6AB9FC-8096-F033-6327-56FFF880B721}"/>
+                <a16:creationId xmlns:a16="http://schemas.microsoft.com/office/drawing/2014/main" xmlns="" id="{1F6AB9FC-8096-F033-6327-56FFF880B721}"/>
               </a:ext>
             </a:extLst>
           </p:cNvPr>
@@ -6468,7 +6468,7 @@
     </p:spTree>
     <p:extLst>
       <p:ext uri="{BB962C8B-B14F-4D97-AF65-F5344CB8AC3E}">
-        <p14:creationId xmlns="" xmlns:p14="http://schemas.microsoft.com/office/powerpoint/2010/main" val="2245502887"/>
+        <p14:creationId xmlns:p14="http://schemas.microsoft.com/office/powerpoint/2010/main" xmlns="" val="2245502887"/>
       </p:ext>
     </p:extLst>
   </p:cSld>
@@ -6486,7 +6486,7 @@
         <p:cNvPr id="1" name="">
           <a:extLst>
             <a:ext uri="{FF2B5EF4-FFF2-40B4-BE49-F238E27FC236}">
-              <a16:creationId xmlns="" xmlns:a16="http://schemas.microsoft.com/office/drawing/2014/main" id="{AB3339B5-8F3B-7354-96D4-A419DED217D6}"/>
+              <a16:creationId xmlns:a16="http://schemas.microsoft.com/office/drawing/2014/main" xmlns="" id="{AB3339B5-8F3B-7354-96D4-A419DED217D6}"/>
             </a:ext>
           </a:extLst>
         </p:cNvPr>
@@ -6506,7 +6506,7 @@
           <p:cNvPr id="2" name="Заголовок 1">
             <a:extLst>
               <a:ext uri="{FF2B5EF4-FFF2-40B4-BE49-F238E27FC236}">
-                <a16:creationId xmlns="" xmlns:a16="http://schemas.microsoft.com/office/drawing/2014/main" id="{9B249CE3-22A4-2BED-CBC1-7B7F40C7CDA9}"/>
+                <a16:creationId xmlns:a16="http://schemas.microsoft.com/office/drawing/2014/main" xmlns="" id="{9B249CE3-22A4-2BED-CBC1-7B7F40C7CDA9}"/>
               </a:ext>
             </a:extLst>
           </p:cNvPr>
@@ -6539,7 +6539,7 @@
           <p:cNvPr id="4" name="Номер слайда 3">
             <a:extLst>
               <a:ext uri="{FF2B5EF4-FFF2-40B4-BE49-F238E27FC236}">
-                <a16:creationId xmlns="" xmlns:a16="http://schemas.microsoft.com/office/drawing/2014/main" id="{1F6AB9FC-8096-F033-6327-56FFF880B721}"/>
+                <a16:creationId xmlns:a16="http://schemas.microsoft.com/office/drawing/2014/main" xmlns="" id="{1F6AB9FC-8096-F033-6327-56FFF880B721}"/>
               </a:ext>
             </a:extLst>
           </p:cNvPr>
@@ -6612,7 +6612,7 @@
     </p:spTree>
     <p:extLst>
       <p:ext uri="{BB962C8B-B14F-4D97-AF65-F5344CB8AC3E}">
-        <p14:creationId xmlns="" xmlns:p14="http://schemas.microsoft.com/office/powerpoint/2010/main" val="2245502887"/>
+        <p14:creationId xmlns:p14="http://schemas.microsoft.com/office/powerpoint/2010/main" xmlns="" val="2245502887"/>
       </p:ext>
     </p:extLst>
   </p:cSld>
@@ -6644,7 +6644,7 @@
           <p:cNvPr id="2" name="Заголовок 1">
             <a:extLst>
               <a:ext uri="{FF2B5EF4-FFF2-40B4-BE49-F238E27FC236}">
-                <a16:creationId xmlns="" xmlns:a16="http://schemas.microsoft.com/office/drawing/2014/main" id="{22C3A3C2-D687-169F-07E2-96522BCB294B}"/>
+                <a16:creationId xmlns:a16="http://schemas.microsoft.com/office/drawing/2014/main" xmlns="" id="{22C3A3C2-D687-169F-07E2-96522BCB294B}"/>
               </a:ext>
             </a:extLst>
           </p:cNvPr>
@@ -6673,7 +6673,7 @@
           <p:cNvPr id="5" name="Объект 2">
             <a:extLst>
               <a:ext uri="{FF2B5EF4-FFF2-40B4-BE49-F238E27FC236}">
-                <a16:creationId xmlns="" xmlns:a16="http://schemas.microsoft.com/office/drawing/2014/main" id="{C1FDFD1A-7858-7093-E4B7-DC2B26015D6A}"/>
+                <a16:creationId xmlns:a16="http://schemas.microsoft.com/office/drawing/2014/main" xmlns="" id="{C1FDFD1A-7858-7093-E4B7-DC2B26015D6A}"/>
               </a:ext>
             </a:extLst>
           </p:cNvPr>
@@ -6713,7 +6713,7 @@
           <p:cNvPr id="3" name="Номер слайда 2">
             <a:extLst>
               <a:ext uri="{FF2B5EF4-FFF2-40B4-BE49-F238E27FC236}">
-                <a16:creationId xmlns="" xmlns:a16="http://schemas.microsoft.com/office/drawing/2014/main" id="{243A178C-D535-49CA-BAFC-79B3A7106E23}"/>
+                <a16:creationId xmlns:a16="http://schemas.microsoft.com/office/drawing/2014/main" xmlns="" id="{243A178C-D535-49CA-BAFC-79B3A7106E23}"/>
               </a:ext>
             </a:extLst>
           </p:cNvPr>
@@ -6774,7 +6774,7 @@
     </p:spTree>
     <p:extLst>
       <p:ext uri="{BB962C8B-B14F-4D97-AF65-F5344CB8AC3E}">
-        <p14:creationId xmlns="" xmlns:p14="http://schemas.microsoft.com/office/powerpoint/2010/main" val="3366118140"/>
+        <p14:creationId xmlns:p14="http://schemas.microsoft.com/office/powerpoint/2010/main" xmlns="" val="3366118140"/>
       </p:ext>
     </p:extLst>
   </p:cSld>
@@ -6792,7 +6792,7 @@
         <p:cNvPr id="1" name="">
           <a:extLst>
             <a:ext uri="{FF2B5EF4-FFF2-40B4-BE49-F238E27FC236}">
-              <a16:creationId xmlns="" xmlns:a16="http://schemas.microsoft.com/office/drawing/2014/main" id="{4B3CC565-3ECB-1A27-8EA5-BFCB1CD648FD}"/>
+              <a16:creationId xmlns:a16="http://schemas.microsoft.com/office/drawing/2014/main" xmlns="" id="{4B3CC565-3ECB-1A27-8EA5-BFCB1CD648FD}"/>
             </a:ext>
           </a:extLst>
         </p:cNvPr>
@@ -6812,7 +6812,7 @@
           <p:cNvPr id="2" name="Заголовок 1">
             <a:extLst>
               <a:ext uri="{FF2B5EF4-FFF2-40B4-BE49-F238E27FC236}">
-                <a16:creationId xmlns="" xmlns:a16="http://schemas.microsoft.com/office/drawing/2014/main" id="{B66C33E1-ADEA-3138-46CA-61C26FB478DE}"/>
+                <a16:creationId xmlns:a16="http://schemas.microsoft.com/office/drawing/2014/main" xmlns="" id="{B66C33E1-ADEA-3138-46CA-61C26FB478DE}"/>
               </a:ext>
             </a:extLst>
           </p:cNvPr>
@@ -6829,8 +6829,8 @@
           <a:lstStyle/>
           <a:p>
             <a:r>
-              <a:rPr lang="en-US" dirty="0" smtClean="0"/>
-              <a:t>GPINN</a:t>
+              <a:rPr lang="en-US" dirty="0" err="1" smtClean="0"/>
+              <a:t>gPINN</a:t>
             </a:r>
             <a:endParaRPr lang="ru-RU" dirty="0"/>
           </a:p>
@@ -6841,7 +6841,7 @@
           <p:cNvPr id="5" name="Объект 2">
             <a:extLst>
               <a:ext uri="{FF2B5EF4-FFF2-40B4-BE49-F238E27FC236}">
-                <a16:creationId xmlns="" xmlns:a16="http://schemas.microsoft.com/office/drawing/2014/main" id="{6C94871B-7A5F-E79D-D660-F3041F35D011}"/>
+                <a16:creationId xmlns:a16="http://schemas.microsoft.com/office/drawing/2014/main" xmlns="" id="{6C94871B-7A5F-E79D-D660-F3041F35D011}"/>
               </a:ext>
             </a:extLst>
           </p:cNvPr>
@@ -6889,7 +6889,7 @@
           <p:cNvPr id="3" name="Номер слайда 2">
             <a:extLst>
               <a:ext uri="{FF2B5EF4-FFF2-40B4-BE49-F238E27FC236}">
-                <a16:creationId xmlns="" xmlns:a16="http://schemas.microsoft.com/office/drawing/2014/main" id="{420B8735-74CF-8911-9226-05B8FDE46219}"/>
+                <a16:creationId xmlns:a16="http://schemas.microsoft.com/office/drawing/2014/main" xmlns="" id="{420B8735-74CF-8911-9226-05B8FDE46219}"/>
               </a:ext>
             </a:extLst>
           </p:cNvPr>
@@ -6983,7 +6983,7 @@
     </p:spTree>
     <p:extLst>
       <p:ext uri="{BB962C8B-B14F-4D97-AF65-F5344CB8AC3E}">
-        <p14:creationId xmlns="" xmlns:p14="http://schemas.microsoft.com/office/powerpoint/2010/main" val="67772030"/>
+        <p14:creationId xmlns:p14="http://schemas.microsoft.com/office/powerpoint/2010/main" xmlns="" val="67772030"/>
       </p:ext>
     </p:extLst>
   </p:cSld>
@@ -7015,7 +7015,7 @@
           <p:cNvPr id="2" name="Заголовок 1">
             <a:extLst>
               <a:ext uri="{FF2B5EF4-FFF2-40B4-BE49-F238E27FC236}">
-                <a16:creationId xmlns="" xmlns:a16="http://schemas.microsoft.com/office/drawing/2014/main" id="{3BAFD6D3-B8C8-EE34-AE42-41EF8FC51EDF}"/>
+                <a16:creationId xmlns:a16="http://schemas.microsoft.com/office/drawing/2014/main" xmlns="" id="{3BAFD6D3-B8C8-EE34-AE42-41EF8FC51EDF}"/>
               </a:ext>
             </a:extLst>
           </p:cNvPr>
@@ -7041,8 +7041,8 @@
               <a:t>Программная реализация </a:t>
             </a:r>
             <a:r>
-              <a:rPr lang="en-US" dirty="0" smtClean="0"/>
-              <a:t>GPINN</a:t>
+              <a:rPr lang="en-US" dirty="0" err="1" smtClean="0"/>
+              <a:t>gPINN</a:t>
             </a:r>
             <a:endParaRPr lang="ru-RU" dirty="0"/>
           </a:p>
@@ -7053,7 +7053,7 @@
           <p:cNvPr id="3" name="Объект 2">
             <a:extLst>
               <a:ext uri="{FF2B5EF4-FFF2-40B4-BE49-F238E27FC236}">
-                <a16:creationId xmlns="" xmlns:a16="http://schemas.microsoft.com/office/drawing/2014/main" id="{F854F796-5ED2-68E0-6680-CC6BFED62E21}"/>
+                <a16:creationId xmlns:a16="http://schemas.microsoft.com/office/drawing/2014/main" xmlns="" id="{F854F796-5ED2-68E0-6680-CC6BFED62E21}"/>
               </a:ext>
             </a:extLst>
           </p:cNvPr>
@@ -7094,7 +7094,7 @@
           <p:cNvPr id="4" name="Номер слайда 3">
             <a:extLst>
               <a:ext uri="{FF2B5EF4-FFF2-40B4-BE49-F238E27FC236}">
-                <a16:creationId xmlns="" xmlns:a16="http://schemas.microsoft.com/office/drawing/2014/main" id="{B8928B30-C3D2-9214-D411-5353BD527509}"/>
+                <a16:creationId xmlns:a16="http://schemas.microsoft.com/office/drawing/2014/main" xmlns="" id="{B8928B30-C3D2-9214-D411-5353BD527509}"/>
               </a:ext>
             </a:extLst>
           </p:cNvPr>
@@ -7155,7 +7155,7 @@
     </p:spTree>
     <p:extLst>
       <p:ext uri="{BB962C8B-B14F-4D97-AF65-F5344CB8AC3E}">
-        <p14:creationId xmlns="" xmlns:p14="http://schemas.microsoft.com/office/powerpoint/2010/main" val="662347663"/>
+        <p14:creationId xmlns:p14="http://schemas.microsoft.com/office/powerpoint/2010/main" xmlns="" val="662347663"/>
       </p:ext>
     </p:extLst>
   </p:cSld>
@@ -7187,7 +7187,7 @@
           <p:cNvPr id="2" name="Заголовок 1">
             <a:extLst>
               <a:ext uri="{FF2B5EF4-FFF2-40B4-BE49-F238E27FC236}">
-                <a16:creationId xmlns="" xmlns:a16="http://schemas.microsoft.com/office/drawing/2014/main" id="{3BAFD6D3-B8C8-EE34-AE42-41EF8FC51EDF}"/>
+                <a16:creationId xmlns:a16="http://schemas.microsoft.com/office/drawing/2014/main" xmlns="" id="{3BAFD6D3-B8C8-EE34-AE42-41EF8FC51EDF}"/>
               </a:ext>
             </a:extLst>
           </p:cNvPr>
@@ -7213,8 +7213,8 @@
               <a:t>Параметры нейронной сети для </a:t>
             </a:r>
             <a:r>
-              <a:rPr lang="en-US" dirty="0" smtClean="0"/>
-              <a:t>GPINN</a:t>
+              <a:rPr lang="en-US" dirty="0" err="1" smtClean="0"/>
+              <a:t>gPINN</a:t>
             </a:r>
             <a:endParaRPr lang="ru-RU" dirty="0"/>
           </a:p>
@@ -7225,7 +7225,7 @@
           <p:cNvPr id="4" name="Номер слайда 3">
             <a:extLst>
               <a:ext uri="{FF2B5EF4-FFF2-40B4-BE49-F238E27FC236}">
-                <a16:creationId xmlns="" xmlns:a16="http://schemas.microsoft.com/office/drawing/2014/main" id="{B8928B30-C3D2-9214-D411-5353BD527509}"/>
+                <a16:creationId xmlns:a16="http://schemas.microsoft.com/office/drawing/2014/main" xmlns="" id="{B8928B30-C3D2-9214-D411-5353BD527509}"/>
               </a:ext>
             </a:extLst>
           </p:cNvPr>
@@ -7551,7 +7551,7 @@
     </p:spTree>
     <p:extLst>
       <p:ext uri="{BB962C8B-B14F-4D97-AF65-F5344CB8AC3E}">
-        <p14:creationId xmlns="" xmlns:p14="http://schemas.microsoft.com/office/powerpoint/2010/main" val="662347663"/>
+        <p14:creationId xmlns:p14="http://schemas.microsoft.com/office/powerpoint/2010/main" xmlns="" val="662347663"/>
       </p:ext>
     </p:extLst>
   </p:cSld>
@@ -7583,7 +7583,7 @@
           <p:cNvPr id="2" name="Заголовок 1">
             <a:extLst>
               <a:ext uri="{FF2B5EF4-FFF2-40B4-BE49-F238E27FC236}">
-                <a16:creationId xmlns="" xmlns:a16="http://schemas.microsoft.com/office/drawing/2014/main" id="{3BAFD6D3-B8C8-EE34-AE42-41EF8FC51EDF}"/>
+                <a16:creationId xmlns:a16="http://schemas.microsoft.com/office/drawing/2014/main" xmlns="" id="{3BAFD6D3-B8C8-EE34-AE42-41EF8FC51EDF}"/>
               </a:ext>
             </a:extLst>
           </p:cNvPr>
@@ -7600,8 +7600,12 @@
           <a:lstStyle/>
           <a:p>
             <a:r>
+              <a:rPr lang="en-US" dirty="0" err="1" smtClean="0"/>
+              <a:t>gPINN</a:t>
+            </a:r>
+            <a:r>
               <a:rPr lang="en-US" dirty="0" smtClean="0"/>
-              <a:t>GPINN </a:t>
+              <a:t> </a:t>
             </a:r>
             <a:r>
               <a:rPr lang="ru-RU" dirty="0" smtClean="0"/>
@@ -7616,7 +7620,7 @@
           <p:cNvPr id="3" name="Объект 2">
             <a:extLst>
               <a:ext uri="{FF2B5EF4-FFF2-40B4-BE49-F238E27FC236}">
-                <a16:creationId xmlns="" xmlns:a16="http://schemas.microsoft.com/office/drawing/2014/main" id="{F854F796-5ED2-68E0-6680-CC6BFED62E21}"/>
+                <a16:creationId xmlns:a16="http://schemas.microsoft.com/office/drawing/2014/main" xmlns="" id="{F854F796-5ED2-68E0-6680-CC6BFED62E21}"/>
               </a:ext>
             </a:extLst>
           </p:cNvPr>
@@ -7653,7 +7657,7 @@
           <p:cNvPr id="4" name="Номер слайда 3">
             <a:extLst>
               <a:ext uri="{FF2B5EF4-FFF2-40B4-BE49-F238E27FC236}">
-                <a16:creationId xmlns="" xmlns:a16="http://schemas.microsoft.com/office/drawing/2014/main" id="{B8928B30-C3D2-9214-D411-5353BD527509}"/>
+                <a16:creationId xmlns:a16="http://schemas.microsoft.com/office/drawing/2014/main" xmlns="" id="{B8928B30-C3D2-9214-D411-5353BD527509}"/>
               </a:ext>
             </a:extLst>
           </p:cNvPr>
@@ -7707,7 +7711,7 @@
     </p:spTree>
     <p:extLst>
       <p:ext uri="{BB962C8B-B14F-4D97-AF65-F5344CB8AC3E}">
-        <p14:creationId xmlns="" xmlns:p14="http://schemas.microsoft.com/office/powerpoint/2010/main" val="662347663"/>
+        <p14:creationId xmlns:p14="http://schemas.microsoft.com/office/powerpoint/2010/main" xmlns="" val="662347663"/>
       </p:ext>
     </p:extLst>
   </p:cSld>
@@ -7739,7 +7743,7 @@
           <p:cNvPr id="2" name="Заголовок 1">
             <a:extLst>
               <a:ext uri="{FF2B5EF4-FFF2-40B4-BE49-F238E27FC236}">
-                <a16:creationId xmlns="" xmlns:a16="http://schemas.microsoft.com/office/drawing/2014/main" id="{3BAFD6D3-B8C8-EE34-AE42-41EF8FC51EDF}"/>
+                <a16:creationId xmlns:a16="http://schemas.microsoft.com/office/drawing/2014/main" xmlns="" id="{3BAFD6D3-B8C8-EE34-AE42-41EF8FC51EDF}"/>
               </a:ext>
             </a:extLst>
           </p:cNvPr>
@@ -7756,8 +7760,16 @@
           <a:lstStyle/>
           <a:p>
             <a:r>
+              <a:rPr lang="en-US" dirty="0" err="1" smtClean="0"/>
+              <a:t>g</a:t>
+            </a:r>
+            <a:r>
+              <a:rPr lang="en-US" dirty="0" err="1" smtClean="0"/>
+              <a:t>PINN</a:t>
+            </a:r>
+            <a:r>
               <a:rPr lang="en-US" dirty="0" smtClean="0"/>
-              <a:t>GPINN </a:t>
+              <a:t> </a:t>
             </a:r>
             <a:r>
               <a:rPr lang="ru-RU" dirty="0" smtClean="0"/>
@@ -7772,7 +7784,7 @@
           <p:cNvPr id="3" name="Объект 2">
             <a:extLst>
               <a:ext uri="{FF2B5EF4-FFF2-40B4-BE49-F238E27FC236}">
-                <a16:creationId xmlns="" xmlns:a16="http://schemas.microsoft.com/office/drawing/2014/main" id="{F854F796-5ED2-68E0-6680-CC6BFED62E21}"/>
+                <a16:creationId xmlns:a16="http://schemas.microsoft.com/office/drawing/2014/main" xmlns="" id="{F854F796-5ED2-68E0-6680-CC6BFED62E21}"/>
               </a:ext>
             </a:extLst>
           </p:cNvPr>
@@ -7809,7 +7821,7 @@
           <p:cNvPr id="4" name="Номер слайда 3">
             <a:extLst>
               <a:ext uri="{FF2B5EF4-FFF2-40B4-BE49-F238E27FC236}">
-                <a16:creationId xmlns="" xmlns:a16="http://schemas.microsoft.com/office/drawing/2014/main" id="{B8928B30-C3D2-9214-D411-5353BD527509}"/>
+                <a16:creationId xmlns:a16="http://schemas.microsoft.com/office/drawing/2014/main" xmlns="" id="{B8928B30-C3D2-9214-D411-5353BD527509}"/>
               </a:ext>
             </a:extLst>
           </p:cNvPr>
@@ -7863,7 +7875,7 @@
     </p:spTree>
     <p:extLst>
       <p:ext uri="{BB962C8B-B14F-4D97-AF65-F5344CB8AC3E}">
-        <p14:creationId xmlns="" xmlns:p14="http://schemas.microsoft.com/office/powerpoint/2010/main" val="662347663"/>
+        <p14:creationId xmlns:p14="http://schemas.microsoft.com/office/powerpoint/2010/main" xmlns="" val="662347663"/>
       </p:ext>
     </p:extLst>
   </p:cSld>
@@ -7881,7 +7893,7 @@
         <p:cNvPr id="1" name="">
           <a:extLst>
             <a:ext uri="{FF2B5EF4-FFF2-40B4-BE49-F238E27FC236}">
-              <a16:creationId xmlns="" xmlns:a16="http://schemas.microsoft.com/office/drawing/2014/main" id="{4B3CC565-3ECB-1A27-8EA5-BFCB1CD648FD}"/>
+              <a16:creationId xmlns:a16="http://schemas.microsoft.com/office/drawing/2014/main" xmlns="" id="{4B3CC565-3ECB-1A27-8EA5-BFCB1CD648FD}"/>
             </a:ext>
           </a:extLst>
         </p:cNvPr>
@@ -7901,7 +7913,7 @@
           <p:cNvPr id="2" name="Заголовок 1">
             <a:extLst>
               <a:ext uri="{FF2B5EF4-FFF2-40B4-BE49-F238E27FC236}">
-                <a16:creationId xmlns="" xmlns:a16="http://schemas.microsoft.com/office/drawing/2014/main" id="{B66C33E1-ADEA-3138-46CA-61C26FB478DE}"/>
+                <a16:creationId xmlns:a16="http://schemas.microsoft.com/office/drawing/2014/main" xmlns="" id="{B66C33E1-ADEA-3138-46CA-61C26FB478DE}"/>
               </a:ext>
             </a:extLst>
           </p:cNvPr>
@@ -7930,7 +7942,7 @@
           <p:cNvPr id="5" name="Объект 2">
             <a:extLst>
               <a:ext uri="{FF2B5EF4-FFF2-40B4-BE49-F238E27FC236}">
-                <a16:creationId xmlns="" xmlns:a16="http://schemas.microsoft.com/office/drawing/2014/main" id="{6C94871B-7A5F-E79D-D660-F3041F35D011}"/>
+                <a16:creationId xmlns:a16="http://schemas.microsoft.com/office/drawing/2014/main" xmlns="" id="{6C94871B-7A5F-E79D-D660-F3041F35D011}"/>
               </a:ext>
             </a:extLst>
           </p:cNvPr>
@@ -8026,7 +8038,7 @@
           <p:cNvPr id="3" name="Номер слайда 2">
             <a:extLst>
               <a:ext uri="{FF2B5EF4-FFF2-40B4-BE49-F238E27FC236}">
-                <a16:creationId xmlns="" xmlns:a16="http://schemas.microsoft.com/office/drawing/2014/main" id="{420B8735-74CF-8911-9226-05B8FDE46219}"/>
+                <a16:creationId xmlns:a16="http://schemas.microsoft.com/office/drawing/2014/main" xmlns="" id="{420B8735-74CF-8911-9226-05B8FDE46219}"/>
               </a:ext>
             </a:extLst>
           </p:cNvPr>
@@ -8054,7 +8066,7 @@
     </p:spTree>
     <p:extLst>
       <p:ext uri="{BB962C8B-B14F-4D97-AF65-F5344CB8AC3E}">
-        <p14:creationId xmlns="" xmlns:p14="http://schemas.microsoft.com/office/powerpoint/2010/main" val="67772030"/>
+        <p14:creationId xmlns:p14="http://schemas.microsoft.com/office/powerpoint/2010/main" xmlns="" val="67772030"/>
       </p:ext>
     </p:extLst>
   </p:cSld>
@@ -8072,7 +8084,7 @@
         <p:cNvPr id="1" name="">
           <a:extLst>
             <a:ext uri="{FF2B5EF4-FFF2-40B4-BE49-F238E27FC236}">
-              <a16:creationId xmlns="" xmlns:a16="http://schemas.microsoft.com/office/drawing/2014/main" id="{4B3CC565-3ECB-1A27-8EA5-BFCB1CD648FD}"/>
+              <a16:creationId xmlns:a16="http://schemas.microsoft.com/office/drawing/2014/main" xmlns="" id="{4B3CC565-3ECB-1A27-8EA5-BFCB1CD648FD}"/>
             </a:ext>
           </a:extLst>
         </p:cNvPr>
@@ -8092,7 +8104,7 @@
           <p:cNvPr id="2" name="Заголовок 1">
             <a:extLst>
               <a:ext uri="{FF2B5EF4-FFF2-40B4-BE49-F238E27FC236}">
-                <a16:creationId xmlns="" xmlns:a16="http://schemas.microsoft.com/office/drawing/2014/main" id="{B66C33E1-ADEA-3138-46CA-61C26FB478DE}"/>
+                <a16:creationId xmlns:a16="http://schemas.microsoft.com/office/drawing/2014/main" xmlns="" id="{B66C33E1-ADEA-3138-46CA-61C26FB478DE}"/>
               </a:ext>
             </a:extLst>
           </p:cNvPr>
@@ -8125,7 +8137,7 @@
           <p:cNvPr id="5" name="Объект 2">
             <a:extLst>
               <a:ext uri="{FF2B5EF4-FFF2-40B4-BE49-F238E27FC236}">
-                <a16:creationId xmlns="" xmlns:a16="http://schemas.microsoft.com/office/drawing/2014/main" id="{6C94871B-7A5F-E79D-D660-F3041F35D011}"/>
+                <a16:creationId xmlns:a16="http://schemas.microsoft.com/office/drawing/2014/main" xmlns="" id="{6C94871B-7A5F-E79D-D660-F3041F35D011}"/>
               </a:ext>
             </a:extLst>
           </p:cNvPr>
@@ -8157,7 +8169,7 @@
           <p:cNvPr id="3" name="Номер слайда 2">
             <a:extLst>
               <a:ext uri="{FF2B5EF4-FFF2-40B4-BE49-F238E27FC236}">
-                <a16:creationId xmlns="" xmlns:a16="http://schemas.microsoft.com/office/drawing/2014/main" id="{420B8735-74CF-8911-9226-05B8FDE46219}"/>
+                <a16:creationId xmlns:a16="http://schemas.microsoft.com/office/drawing/2014/main" xmlns="" id="{420B8735-74CF-8911-9226-05B8FDE46219}"/>
               </a:ext>
             </a:extLst>
           </p:cNvPr>
@@ -8218,7 +8230,7 @@
     </p:spTree>
     <p:extLst>
       <p:ext uri="{BB962C8B-B14F-4D97-AF65-F5344CB8AC3E}">
-        <p14:creationId xmlns="" xmlns:p14="http://schemas.microsoft.com/office/powerpoint/2010/main" val="67772030"/>
+        <p14:creationId xmlns:p14="http://schemas.microsoft.com/office/powerpoint/2010/main" xmlns="" val="67772030"/>
       </p:ext>
     </p:extLst>
   </p:cSld>
@@ -8505,7 +8517,7 @@
   <a:extraClrSchemeLst/>
   <a:extLst>
     <a:ext uri="{05A4C25C-085E-4340-85A3-A5531E510DB2}">
-      <thm15:themeFamily xmlns="" xmlns:thm15="http://schemas.microsoft.com/office/thememl/2012/main" name="Retrospect" id="{5F128B03-DCCA-4EEB-AB3B-CF2899314A46}" vid="{243AF7DC-D15B-41C0-AE81-23980D1B9FC4}"/>
+      <thm15:themeFamily xmlns:thm15="http://schemas.microsoft.com/office/thememl/2012/main" xmlns="" name="Retrospect" id="{5F128B03-DCCA-4EEB-AB3B-CF2899314A46}" vid="{243AF7DC-D15B-41C0-AE81-23980D1B9FC4}"/>
     </a:ext>
   </a:extLst>
 </a:theme>
@@ -8800,7 +8812,7 @@
   <a:extraClrSchemeLst/>
   <a:extLst>
     <a:ext uri="{05A4C25C-085E-4340-85A3-A5531E510DB2}">
-      <thm15:themeFamily xmlns="" xmlns:thm15="http://schemas.microsoft.com/office/thememl/2012/main" name="Office Theme" id="{62F939B6-93AF-4DB8-9C6B-D6C7DFDC589F}" vid="{4A3C46E8-61CC-4603-A589-7422A47A8E4A}"/>
+      <thm15:themeFamily xmlns:thm15="http://schemas.microsoft.com/office/thememl/2012/main" xmlns="" name="Office Theme" id="{62F939B6-93AF-4DB8-9C6B-D6C7DFDC589F}" vid="{4A3C46E8-61CC-4603-A589-7422A47A8E4A}"/>
     </a:ext>
   </a:extLst>
 </a:theme>
